--- a/docs/grano_share_5min.pptx
+++ b/docs/grano_share_5min.pptx
@@ -12,12 +12,6 @@
     <p:sldId id="260" r:id="rId11"/>
     <p:sldId id="261" r:id="rId12"/>
     <p:sldId id="262" r:id="rId13"/>
-    <p:sldId id="263" r:id="rId14"/>
-    <p:sldId id="264" r:id="rId15"/>
-    <p:sldId id="265" r:id="rId16"/>
-    <p:sldId id="266" r:id="rId17"/>
-    <p:sldId id="267" r:id="rId18"/>
-    <p:sldId id="268" r:id="rId19"/>
   </p:sldIdLst>
   <p:sldSz cx="12191999" cy="6858000" type="screen4x3"/>
   <p:notesSz cx="6858000" cy="9144000"/>
@@ -3132,174 +3126,6 @@
 </p:sld>
 </file>
 
-<file path=ppt/slides/slide10.xml><?xml version="1.0" encoding="utf-8"?>
-<p:sld xmlns:a="http://schemas.openxmlformats.org/drawingml/2006/main" xmlns:p="http://schemas.openxmlformats.org/presentationml/2006/main" xmlns:r="http://schemas.openxmlformats.org/officeDocument/2006/relationships">
-  <p:cSld>
-    <p:spTree>
-      <p:nvGrpSpPr>
-        <p:cNvPr id="1" name=""/>
-        <p:cNvGrpSpPr/>
-        <p:nvPr/>
-      </p:nvGrpSpPr>
-      <p:grpSpPr/>
-      <p:pic>
-        <p:nvPicPr>
-          <p:cNvPr id="2" name="Picture 1" descr="05_00.jpg"/>
-          <p:cNvPicPr>
-            <a:picLocks noChangeAspect="1"/>
-          </p:cNvPicPr>
-          <p:nvPr/>
-        </p:nvPicPr>
-        <p:blipFill>
-          <a:blip r:embed="rId2"/>
-          <a:stretch>
-            <a:fillRect/>
-          </a:stretch>
-        </p:blipFill>
-        <p:spPr>
-          <a:xfrm>
-            <a:off x="0" y="0"/>
-            <a:ext cx="12191999" cy="6858000"/>
-          </a:xfrm>
-          <a:prstGeom prst="rect">
-            <a:avLst/>
-          </a:prstGeom>
-        </p:spPr>
-      </p:pic>
-    </p:spTree>
-  </p:cSld>
-  <p:clrMapOvr>
-    <a:masterClrMapping/>
-  </p:clrMapOvr>
-</p:sld>
-</file>
-
-<file path=ppt/slides/slide11.xml><?xml version="1.0" encoding="utf-8"?>
-<p:sld xmlns:a="http://schemas.openxmlformats.org/drawingml/2006/main" xmlns:p="http://schemas.openxmlformats.org/presentationml/2006/main" xmlns:r="http://schemas.openxmlformats.org/officeDocument/2006/relationships">
-  <p:cSld>
-    <p:spTree>
-      <p:nvGrpSpPr>
-        <p:cNvPr id="1" name=""/>
-        <p:cNvGrpSpPr/>
-        <p:nvPr/>
-      </p:nvGrpSpPr>
-      <p:grpSpPr/>
-      <p:pic>
-        <p:nvPicPr>
-          <p:cNvPr id="2" name="Picture 1" descr="05_01.jpg"/>
-          <p:cNvPicPr>
-            <a:picLocks noChangeAspect="1"/>
-          </p:cNvPicPr>
-          <p:nvPr/>
-        </p:nvPicPr>
-        <p:blipFill>
-          <a:blip r:embed="rId2"/>
-          <a:stretch>
-            <a:fillRect/>
-          </a:stretch>
-        </p:blipFill>
-        <p:spPr>
-          <a:xfrm>
-            <a:off x="0" y="0"/>
-            <a:ext cx="12191999" cy="6858000"/>
-          </a:xfrm>
-          <a:prstGeom prst="rect">
-            <a:avLst/>
-          </a:prstGeom>
-        </p:spPr>
-      </p:pic>
-    </p:spTree>
-  </p:cSld>
-  <p:clrMapOvr>
-    <a:masterClrMapping/>
-  </p:clrMapOvr>
-</p:sld>
-</file>
-
-<file path=ppt/slides/slide12.xml><?xml version="1.0" encoding="utf-8"?>
-<p:sld xmlns:a="http://schemas.openxmlformats.org/drawingml/2006/main" xmlns:p="http://schemas.openxmlformats.org/presentationml/2006/main" xmlns:r="http://schemas.openxmlformats.org/officeDocument/2006/relationships">
-  <p:cSld>
-    <p:spTree>
-      <p:nvGrpSpPr>
-        <p:cNvPr id="1" name=""/>
-        <p:cNvGrpSpPr/>
-        <p:nvPr/>
-      </p:nvGrpSpPr>
-      <p:grpSpPr/>
-      <p:pic>
-        <p:nvPicPr>
-          <p:cNvPr id="2" name="Picture 1" descr="06_00.jpg"/>
-          <p:cNvPicPr>
-            <a:picLocks noChangeAspect="1"/>
-          </p:cNvPicPr>
-          <p:nvPr/>
-        </p:nvPicPr>
-        <p:blipFill>
-          <a:blip r:embed="rId2"/>
-          <a:stretch>
-            <a:fillRect/>
-          </a:stretch>
-        </p:blipFill>
-        <p:spPr>
-          <a:xfrm>
-            <a:off x="0" y="0"/>
-            <a:ext cx="12191999" cy="6858000"/>
-          </a:xfrm>
-          <a:prstGeom prst="rect">
-            <a:avLst/>
-          </a:prstGeom>
-        </p:spPr>
-      </p:pic>
-    </p:spTree>
-  </p:cSld>
-  <p:clrMapOvr>
-    <a:masterClrMapping/>
-  </p:clrMapOvr>
-</p:sld>
-</file>
-
-<file path=ppt/slides/slide13.xml><?xml version="1.0" encoding="utf-8"?>
-<p:sld xmlns:a="http://schemas.openxmlformats.org/drawingml/2006/main" xmlns:p="http://schemas.openxmlformats.org/presentationml/2006/main" xmlns:r="http://schemas.openxmlformats.org/officeDocument/2006/relationships">
-  <p:cSld>
-    <p:spTree>
-      <p:nvGrpSpPr>
-        <p:cNvPr id="1" name=""/>
-        <p:cNvGrpSpPr/>
-        <p:nvPr/>
-      </p:nvGrpSpPr>
-      <p:grpSpPr/>
-      <p:pic>
-        <p:nvPicPr>
-          <p:cNvPr id="2" name="Picture 1" descr="06_01.jpg"/>
-          <p:cNvPicPr>
-            <a:picLocks noChangeAspect="1"/>
-          </p:cNvPicPr>
-          <p:nvPr/>
-        </p:nvPicPr>
-        <p:blipFill>
-          <a:blip r:embed="rId2"/>
-          <a:stretch>
-            <a:fillRect/>
-          </a:stretch>
-        </p:blipFill>
-        <p:spPr>
-          <a:xfrm>
-            <a:off x="0" y="0"/>
-            <a:ext cx="12191999" cy="6858000"/>
-          </a:xfrm>
-          <a:prstGeom prst="rect">
-            <a:avLst/>
-          </a:prstGeom>
-        </p:spPr>
-      </p:pic>
-    </p:spTree>
-  </p:cSld>
-  <p:clrMapOvr>
-    <a:masterClrMapping/>
-  </p:clrMapOvr>
-</p:sld>
-</file>
-
 <file path=ppt/slides/slide2.xml><?xml version="1.0" encoding="utf-8"?>
 <p:sld xmlns:a="http://schemas.openxmlformats.org/drawingml/2006/main" xmlns:p="http://schemas.openxmlformats.org/presentationml/2006/main" xmlns:r="http://schemas.openxmlformats.org/officeDocument/2006/relationships">
   <p:cSld>
@@ -3396,7 +3222,7 @@
       <p:grpSpPr/>
       <p:pic>
         <p:nvPicPr>
-          <p:cNvPr id="2" name="Picture 1" descr="02_01.jpg"/>
+          <p:cNvPr id="2" name="Picture 1" descr="03_00.jpg"/>
           <p:cNvPicPr>
             <a:picLocks noChangeAspect="1"/>
           </p:cNvPicPr>
@@ -3438,7 +3264,7 @@
       <p:grpSpPr/>
       <p:pic>
         <p:nvPicPr>
-          <p:cNvPr id="2" name="Picture 1" descr="03_00.jpg"/>
+          <p:cNvPr id="2" name="Picture 1" descr="04_00.jpg"/>
           <p:cNvPicPr>
             <a:picLocks noChangeAspect="1"/>
           </p:cNvPicPr>
@@ -3480,7 +3306,7 @@
       <p:grpSpPr/>
       <p:pic>
         <p:nvPicPr>
-          <p:cNvPr id="2" name="Picture 1" descr="03_01.jpg"/>
+          <p:cNvPr id="2" name="Picture 1" descr="05_00.jpg"/>
           <p:cNvPicPr>
             <a:picLocks noChangeAspect="1"/>
           </p:cNvPicPr>
@@ -3522,91 +3348,7 @@
       <p:grpSpPr/>
       <p:pic>
         <p:nvPicPr>
-          <p:cNvPr id="2" name="Picture 1" descr="04_00.jpg"/>
-          <p:cNvPicPr>
-            <a:picLocks noChangeAspect="1"/>
-          </p:cNvPicPr>
-          <p:nvPr/>
-        </p:nvPicPr>
-        <p:blipFill>
-          <a:blip r:embed="rId2"/>
-          <a:stretch>
-            <a:fillRect/>
-          </a:stretch>
-        </p:blipFill>
-        <p:spPr>
-          <a:xfrm>
-            <a:off x="0" y="0"/>
-            <a:ext cx="12191999" cy="6858000"/>
-          </a:xfrm>
-          <a:prstGeom prst="rect">
-            <a:avLst/>
-          </a:prstGeom>
-        </p:spPr>
-      </p:pic>
-    </p:spTree>
-  </p:cSld>
-  <p:clrMapOvr>
-    <a:masterClrMapping/>
-  </p:clrMapOvr>
-</p:sld>
-</file>
-
-<file path=ppt/slides/slide8.xml><?xml version="1.0" encoding="utf-8"?>
-<p:sld xmlns:a="http://schemas.openxmlformats.org/drawingml/2006/main" xmlns:p="http://schemas.openxmlformats.org/presentationml/2006/main" xmlns:r="http://schemas.openxmlformats.org/officeDocument/2006/relationships">
-  <p:cSld>
-    <p:spTree>
-      <p:nvGrpSpPr>
-        <p:cNvPr id="1" name=""/>
-        <p:cNvGrpSpPr/>
-        <p:nvPr/>
-      </p:nvGrpSpPr>
-      <p:grpSpPr/>
-      <p:pic>
-        <p:nvPicPr>
-          <p:cNvPr id="2" name="Picture 1" descr="04_01.jpg"/>
-          <p:cNvPicPr>
-            <a:picLocks noChangeAspect="1"/>
-          </p:cNvPicPr>
-          <p:nvPr/>
-        </p:nvPicPr>
-        <p:blipFill>
-          <a:blip r:embed="rId2"/>
-          <a:stretch>
-            <a:fillRect/>
-          </a:stretch>
-        </p:blipFill>
-        <p:spPr>
-          <a:xfrm>
-            <a:off x="0" y="0"/>
-            <a:ext cx="12191999" cy="6858000"/>
-          </a:xfrm>
-          <a:prstGeom prst="rect">
-            <a:avLst/>
-          </a:prstGeom>
-        </p:spPr>
-      </p:pic>
-    </p:spTree>
-  </p:cSld>
-  <p:clrMapOvr>
-    <a:masterClrMapping/>
-  </p:clrMapOvr>
-</p:sld>
-</file>
-
-<file path=ppt/slides/slide9.xml><?xml version="1.0" encoding="utf-8"?>
-<p:sld xmlns:a="http://schemas.openxmlformats.org/drawingml/2006/main" xmlns:p="http://schemas.openxmlformats.org/presentationml/2006/main" xmlns:r="http://schemas.openxmlformats.org/officeDocument/2006/relationships">
-  <p:cSld>
-    <p:spTree>
-      <p:nvGrpSpPr>
-        <p:cNvPr id="1" name=""/>
-        <p:cNvGrpSpPr/>
-        <p:nvPr/>
-      </p:nvGrpSpPr>
-      <p:grpSpPr/>
-      <p:pic>
-        <p:nvPicPr>
-          <p:cNvPr id="2" name="Picture 1" descr="04_02.jpg"/>
+          <p:cNvPr id="2" name="Picture 1" descr="06_00.jpg"/>
           <p:cNvPicPr>
             <a:picLocks noChangeAspect="1"/>
           </p:cNvPicPr>

--- a/docs/grano_share_5min.pptx
+++ b/docs/grano_share_5min.pptx
@@ -12,6 +12,12 @@
     <p:sldId id="260" r:id="rId11"/>
     <p:sldId id="261" r:id="rId12"/>
     <p:sldId id="262" r:id="rId13"/>
+    <p:sldId id="263" r:id="rId14"/>
+    <p:sldId id="264" r:id="rId15"/>
+    <p:sldId id="265" r:id="rId16"/>
+    <p:sldId id="266" r:id="rId17"/>
+    <p:sldId id="267" r:id="rId18"/>
+    <p:sldId id="268" r:id="rId19"/>
   </p:sldIdLst>
   <p:sldSz cx="12191999" cy="6858000" type="screen4x3"/>
   <p:notesSz cx="6858000" cy="9144000"/>
@@ -3126,6 +3132,174 @@
 </p:sld>
 </file>
 
+<file path=ppt/slides/slide10.xml><?xml version="1.0" encoding="utf-8"?>
+<p:sld xmlns:a="http://schemas.openxmlformats.org/drawingml/2006/main" xmlns:p="http://schemas.openxmlformats.org/presentationml/2006/main" xmlns:r="http://schemas.openxmlformats.org/officeDocument/2006/relationships">
+  <p:cSld>
+    <p:spTree>
+      <p:nvGrpSpPr>
+        <p:cNvPr id="1" name=""/>
+        <p:cNvGrpSpPr/>
+        <p:nvPr/>
+      </p:nvGrpSpPr>
+      <p:grpSpPr/>
+      <p:pic>
+        <p:nvPicPr>
+          <p:cNvPr id="2" name="Picture 1" descr="05_00.jpg"/>
+          <p:cNvPicPr>
+            <a:picLocks noChangeAspect="1"/>
+          </p:cNvPicPr>
+          <p:nvPr/>
+        </p:nvPicPr>
+        <p:blipFill>
+          <a:blip r:embed="rId2"/>
+          <a:stretch>
+            <a:fillRect/>
+          </a:stretch>
+        </p:blipFill>
+        <p:spPr>
+          <a:xfrm>
+            <a:off x="0" y="0"/>
+            <a:ext cx="12191999" cy="6858000"/>
+          </a:xfrm>
+          <a:prstGeom prst="rect">
+            <a:avLst/>
+          </a:prstGeom>
+        </p:spPr>
+      </p:pic>
+    </p:spTree>
+  </p:cSld>
+  <p:clrMapOvr>
+    <a:masterClrMapping/>
+  </p:clrMapOvr>
+</p:sld>
+</file>
+
+<file path=ppt/slides/slide11.xml><?xml version="1.0" encoding="utf-8"?>
+<p:sld xmlns:a="http://schemas.openxmlformats.org/drawingml/2006/main" xmlns:p="http://schemas.openxmlformats.org/presentationml/2006/main" xmlns:r="http://schemas.openxmlformats.org/officeDocument/2006/relationships">
+  <p:cSld>
+    <p:spTree>
+      <p:nvGrpSpPr>
+        <p:cNvPr id="1" name=""/>
+        <p:cNvGrpSpPr/>
+        <p:nvPr/>
+      </p:nvGrpSpPr>
+      <p:grpSpPr/>
+      <p:pic>
+        <p:nvPicPr>
+          <p:cNvPr id="2" name="Picture 1" descr="05_01.jpg"/>
+          <p:cNvPicPr>
+            <a:picLocks noChangeAspect="1"/>
+          </p:cNvPicPr>
+          <p:nvPr/>
+        </p:nvPicPr>
+        <p:blipFill>
+          <a:blip r:embed="rId2"/>
+          <a:stretch>
+            <a:fillRect/>
+          </a:stretch>
+        </p:blipFill>
+        <p:spPr>
+          <a:xfrm>
+            <a:off x="0" y="0"/>
+            <a:ext cx="12191999" cy="6858000"/>
+          </a:xfrm>
+          <a:prstGeom prst="rect">
+            <a:avLst/>
+          </a:prstGeom>
+        </p:spPr>
+      </p:pic>
+    </p:spTree>
+  </p:cSld>
+  <p:clrMapOvr>
+    <a:masterClrMapping/>
+  </p:clrMapOvr>
+</p:sld>
+</file>
+
+<file path=ppt/slides/slide12.xml><?xml version="1.0" encoding="utf-8"?>
+<p:sld xmlns:a="http://schemas.openxmlformats.org/drawingml/2006/main" xmlns:p="http://schemas.openxmlformats.org/presentationml/2006/main" xmlns:r="http://schemas.openxmlformats.org/officeDocument/2006/relationships">
+  <p:cSld>
+    <p:spTree>
+      <p:nvGrpSpPr>
+        <p:cNvPr id="1" name=""/>
+        <p:cNvGrpSpPr/>
+        <p:nvPr/>
+      </p:nvGrpSpPr>
+      <p:grpSpPr/>
+      <p:pic>
+        <p:nvPicPr>
+          <p:cNvPr id="2" name="Picture 1" descr="06_00.jpg"/>
+          <p:cNvPicPr>
+            <a:picLocks noChangeAspect="1"/>
+          </p:cNvPicPr>
+          <p:nvPr/>
+        </p:nvPicPr>
+        <p:blipFill>
+          <a:blip r:embed="rId2"/>
+          <a:stretch>
+            <a:fillRect/>
+          </a:stretch>
+        </p:blipFill>
+        <p:spPr>
+          <a:xfrm>
+            <a:off x="0" y="0"/>
+            <a:ext cx="12191999" cy="6858000"/>
+          </a:xfrm>
+          <a:prstGeom prst="rect">
+            <a:avLst/>
+          </a:prstGeom>
+        </p:spPr>
+      </p:pic>
+    </p:spTree>
+  </p:cSld>
+  <p:clrMapOvr>
+    <a:masterClrMapping/>
+  </p:clrMapOvr>
+</p:sld>
+</file>
+
+<file path=ppt/slides/slide13.xml><?xml version="1.0" encoding="utf-8"?>
+<p:sld xmlns:a="http://schemas.openxmlformats.org/drawingml/2006/main" xmlns:p="http://schemas.openxmlformats.org/presentationml/2006/main" xmlns:r="http://schemas.openxmlformats.org/officeDocument/2006/relationships">
+  <p:cSld>
+    <p:spTree>
+      <p:nvGrpSpPr>
+        <p:cNvPr id="1" name=""/>
+        <p:cNvGrpSpPr/>
+        <p:nvPr/>
+      </p:nvGrpSpPr>
+      <p:grpSpPr/>
+      <p:pic>
+        <p:nvPicPr>
+          <p:cNvPr id="2" name="Picture 1" descr="06_01.jpg"/>
+          <p:cNvPicPr>
+            <a:picLocks noChangeAspect="1"/>
+          </p:cNvPicPr>
+          <p:nvPr/>
+        </p:nvPicPr>
+        <p:blipFill>
+          <a:blip r:embed="rId2"/>
+          <a:stretch>
+            <a:fillRect/>
+          </a:stretch>
+        </p:blipFill>
+        <p:spPr>
+          <a:xfrm>
+            <a:off x="0" y="0"/>
+            <a:ext cx="12191999" cy="6858000"/>
+          </a:xfrm>
+          <a:prstGeom prst="rect">
+            <a:avLst/>
+          </a:prstGeom>
+        </p:spPr>
+      </p:pic>
+    </p:spTree>
+  </p:cSld>
+  <p:clrMapOvr>
+    <a:masterClrMapping/>
+  </p:clrMapOvr>
+</p:sld>
+</file>
+
 <file path=ppt/slides/slide2.xml><?xml version="1.0" encoding="utf-8"?>
 <p:sld xmlns:a="http://schemas.openxmlformats.org/drawingml/2006/main" xmlns:p="http://schemas.openxmlformats.org/presentationml/2006/main" xmlns:r="http://schemas.openxmlformats.org/officeDocument/2006/relationships">
   <p:cSld>
@@ -3222,7 +3396,7 @@
       <p:grpSpPr/>
       <p:pic>
         <p:nvPicPr>
-          <p:cNvPr id="2" name="Picture 1" descr="03_00.jpg"/>
+          <p:cNvPr id="2" name="Picture 1" descr="02_01.jpg"/>
           <p:cNvPicPr>
             <a:picLocks noChangeAspect="1"/>
           </p:cNvPicPr>
@@ -3264,7 +3438,7 @@
       <p:grpSpPr/>
       <p:pic>
         <p:nvPicPr>
-          <p:cNvPr id="2" name="Picture 1" descr="04_00.jpg"/>
+          <p:cNvPr id="2" name="Picture 1" descr="03_00.jpg"/>
           <p:cNvPicPr>
             <a:picLocks noChangeAspect="1"/>
           </p:cNvPicPr>
@@ -3306,7 +3480,7 @@
       <p:grpSpPr/>
       <p:pic>
         <p:nvPicPr>
-          <p:cNvPr id="2" name="Picture 1" descr="05_00.jpg"/>
+          <p:cNvPr id="2" name="Picture 1" descr="03_01.jpg"/>
           <p:cNvPicPr>
             <a:picLocks noChangeAspect="1"/>
           </p:cNvPicPr>
@@ -3348,7 +3522,91 @@
       <p:grpSpPr/>
       <p:pic>
         <p:nvPicPr>
-          <p:cNvPr id="2" name="Picture 1" descr="06_00.jpg"/>
+          <p:cNvPr id="2" name="Picture 1" descr="04_00.jpg"/>
+          <p:cNvPicPr>
+            <a:picLocks noChangeAspect="1"/>
+          </p:cNvPicPr>
+          <p:nvPr/>
+        </p:nvPicPr>
+        <p:blipFill>
+          <a:blip r:embed="rId2"/>
+          <a:stretch>
+            <a:fillRect/>
+          </a:stretch>
+        </p:blipFill>
+        <p:spPr>
+          <a:xfrm>
+            <a:off x="0" y="0"/>
+            <a:ext cx="12191999" cy="6858000"/>
+          </a:xfrm>
+          <a:prstGeom prst="rect">
+            <a:avLst/>
+          </a:prstGeom>
+        </p:spPr>
+      </p:pic>
+    </p:spTree>
+  </p:cSld>
+  <p:clrMapOvr>
+    <a:masterClrMapping/>
+  </p:clrMapOvr>
+</p:sld>
+</file>
+
+<file path=ppt/slides/slide8.xml><?xml version="1.0" encoding="utf-8"?>
+<p:sld xmlns:a="http://schemas.openxmlformats.org/drawingml/2006/main" xmlns:p="http://schemas.openxmlformats.org/presentationml/2006/main" xmlns:r="http://schemas.openxmlformats.org/officeDocument/2006/relationships">
+  <p:cSld>
+    <p:spTree>
+      <p:nvGrpSpPr>
+        <p:cNvPr id="1" name=""/>
+        <p:cNvGrpSpPr/>
+        <p:nvPr/>
+      </p:nvGrpSpPr>
+      <p:grpSpPr/>
+      <p:pic>
+        <p:nvPicPr>
+          <p:cNvPr id="2" name="Picture 1" descr="04_01.jpg"/>
+          <p:cNvPicPr>
+            <a:picLocks noChangeAspect="1"/>
+          </p:cNvPicPr>
+          <p:nvPr/>
+        </p:nvPicPr>
+        <p:blipFill>
+          <a:blip r:embed="rId2"/>
+          <a:stretch>
+            <a:fillRect/>
+          </a:stretch>
+        </p:blipFill>
+        <p:spPr>
+          <a:xfrm>
+            <a:off x="0" y="0"/>
+            <a:ext cx="12191999" cy="6858000"/>
+          </a:xfrm>
+          <a:prstGeom prst="rect">
+            <a:avLst/>
+          </a:prstGeom>
+        </p:spPr>
+      </p:pic>
+    </p:spTree>
+  </p:cSld>
+  <p:clrMapOvr>
+    <a:masterClrMapping/>
+  </p:clrMapOvr>
+</p:sld>
+</file>
+
+<file path=ppt/slides/slide9.xml><?xml version="1.0" encoding="utf-8"?>
+<p:sld xmlns:a="http://schemas.openxmlformats.org/drawingml/2006/main" xmlns:p="http://schemas.openxmlformats.org/presentationml/2006/main" xmlns:r="http://schemas.openxmlformats.org/officeDocument/2006/relationships">
+  <p:cSld>
+    <p:spTree>
+      <p:nvGrpSpPr>
+        <p:cNvPr id="1" name=""/>
+        <p:cNvGrpSpPr/>
+        <p:nvPr/>
+      </p:nvGrpSpPr>
+      <p:grpSpPr/>
+      <p:pic>
+        <p:nvPicPr>
+          <p:cNvPr id="2" name="Picture 1" descr="04_02.jpg"/>
           <p:cNvPicPr>
             <a:picLocks noChangeAspect="1"/>
           </p:cNvPicPr>

--- a/docs/grano_share_5min.pptx
+++ b/docs/grano_share_5min.pptx
@@ -18,6 +18,7 @@
     <p:sldId id="266" r:id="rId17"/>
     <p:sldId id="267" r:id="rId18"/>
     <p:sldId id="268" r:id="rId19"/>
+    <p:sldId id="269" r:id="rId20"/>
   </p:sldIdLst>
   <p:sldSz cx="12191999" cy="6858000" type="screen4x3"/>
   <p:notesSz cx="6858000" cy="9144000"/>
@@ -3271,6 +3272,48 @@
       <p:pic>
         <p:nvPicPr>
           <p:cNvPr id="2" name="Picture 1" descr="06_01.jpg"/>
+          <p:cNvPicPr>
+            <a:picLocks noChangeAspect="1"/>
+          </p:cNvPicPr>
+          <p:nvPr/>
+        </p:nvPicPr>
+        <p:blipFill>
+          <a:blip r:embed="rId2"/>
+          <a:stretch>
+            <a:fillRect/>
+          </a:stretch>
+        </p:blipFill>
+        <p:spPr>
+          <a:xfrm>
+            <a:off x="0" y="0"/>
+            <a:ext cx="12191999" cy="6858000"/>
+          </a:xfrm>
+          <a:prstGeom prst="rect">
+            <a:avLst/>
+          </a:prstGeom>
+        </p:spPr>
+      </p:pic>
+    </p:spTree>
+  </p:cSld>
+  <p:clrMapOvr>
+    <a:masterClrMapping/>
+  </p:clrMapOvr>
+</p:sld>
+</file>
+
+<file path=ppt/slides/slide14.xml><?xml version="1.0" encoding="utf-8"?>
+<p:sld xmlns:a="http://schemas.openxmlformats.org/drawingml/2006/main" xmlns:p="http://schemas.openxmlformats.org/presentationml/2006/main" xmlns:r="http://schemas.openxmlformats.org/officeDocument/2006/relationships">
+  <p:cSld>
+    <p:spTree>
+      <p:nvGrpSpPr>
+        <p:cNvPr id="1" name=""/>
+        <p:cNvGrpSpPr/>
+        <p:nvPr/>
+      </p:nvGrpSpPr>
+      <p:grpSpPr/>
+      <p:pic>
+        <p:nvPicPr>
+          <p:cNvPr id="2" name="Picture 1" descr="06_02.jpg"/>
           <p:cNvPicPr>
             <a:picLocks noChangeAspect="1"/>
           </p:cNvPicPr>

--- a/docs/grano_share_5min.pptx
+++ b/docs/grano_share_5min.pptx
@@ -18,7 +18,6 @@
     <p:sldId id="266" r:id="rId17"/>
     <p:sldId id="267" r:id="rId18"/>
     <p:sldId id="268" r:id="rId19"/>
-    <p:sldId id="269" r:id="rId20"/>
   </p:sldIdLst>
   <p:sldSz cx="12191999" cy="6858000" type="screen4x3"/>
   <p:notesSz cx="6858000" cy="9144000"/>
@@ -3272,48 +3271,6 @@
       <p:pic>
         <p:nvPicPr>
           <p:cNvPr id="2" name="Picture 1" descr="06_01.jpg"/>
-          <p:cNvPicPr>
-            <a:picLocks noChangeAspect="1"/>
-          </p:cNvPicPr>
-          <p:nvPr/>
-        </p:nvPicPr>
-        <p:blipFill>
-          <a:blip r:embed="rId2"/>
-          <a:stretch>
-            <a:fillRect/>
-          </a:stretch>
-        </p:blipFill>
-        <p:spPr>
-          <a:xfrm>
-            <a:off x="0" y="0"/>
-            <a:ext cx="12191999" cy="6858000"/>
-          </a:xfrm>
-          <a:prstGeom prst="rect">
-            <a:avLst/>
-          </a:prstGeom>
-        </p:spPr>
-      </p:pic>
-    </p:spTree>
-  </p:cSld>
-  <p:clrMapOvr>
-    <a:masterClrMapping/>
-  </p:clrMapOvr>
-</p:sld>
-</file>
-
-<file path=ppt/slides/slide14.xml><?xml version="1.0" encoding="utf-8"?>
-<p:sld xmlns:a="http://schemas.openxmlformats.org/drawingml/2006/main" xmlns:p="http://schemas.openxmlformats.org/presentationml/2006/main" xmlns:r="http://schemas.openxmlformats.org/officeDocument/2006/relationships">
-  <p:cSld>
-    <p:spTree>
-      <p:nvGrpSpPr>
-        <p:cNvPr id="1" name=""/>
-        <p:cNvGrpSpPr/>
-        <p:nvPr/>
-      </p:nvGrpSpPr>
-      <p:grpSpPr/>
-      <p:pic>
-        <p:nvPicPr>
-          <p:cNvPr id="2" name="Picture 1" descr="06_02.jpg"/>
           <p:cNvPicPr>
             <a:picLocks noChangeAspect="1"/>
           </p:cNvPicPr>

--- a/docs/grano_share_5min.pptx
+++ b/docs/grano_share_5min.pptx
@@ -3096,7 +3096,7 @@
       <p:grpSpPr/>
       <p:pic>
         <p:nvPicPr>
-          <p:cNvPr id="2" name="Picture 1" descr="00_00.jpg"/>
+          <p:cNvPr id="2" name="Picture 1" descr="00_bg.jpg"/>
           <p:cNvPicPr>
             <a:picLocks noChangeAspect="1"/>
           </p:cNvPicPr>
@@ -3118,6 +3118,118 @@
           </a:prstGeom>
         </p:spPr>
       </p:pic>
+      <p:sp>
+        <p:nvSpPr>
+          <p:cNvPr id="3" name="TextBox 2"/>
+          <p:cNvSpPr txBox="1"/>
+          <p:nvPr/>
+        </p:nvSpPr>
+        <p:spPr>
+          <a:xfrm>
+            <a:off x="609599" y="3890863"/>
+            <a:ext cx="4577059" cy="1365448"/>
+          </a:xfrm>
+          <a:prstGeom prst="rect">
+            <a:avLst/>
+          </a:prstGeom>
+          <a:noFill/>
+        </p:spPr>
+        <p:txBody>
+          <a:bodyPr wrap="square" lIns="0" rIns="0" tIns="0" bIns="0" anchor="t">
+            <a:spAutoFit/>
+          </a:bodyPr>
+          <a:lstStyle/>
+          <a:p>
+            <a:pPr algn="l">
+              <a:lnSpc>
+                <a:spcPct val="112000"/>
+              </a:lnSpc>
+              <a:spcBef>
+                <a:spcPts val="0"/>
+              </a:spcBef>
+              <a:spcAft>
+                <a:spcPts val="0"/>
+              </a:spcAft>
+              <a:defRPr sz="4800" b="1">
+                <a:solidFill>
+                  <a:srgbClr val="F4EEE4"/>
+                </a:solidFill>
+                <a:latin typeface="Yu Mincho"/>
+              </a:defRPr>
+            </a:pPr>
+            <a:r>
+              <a:t>一人では、</a:t>
+            </a:r>
+          </a:p>
+          <a:p>
+            <a:pPr algn="l">
+              <a:lnSpc>
+                <a:spcPct val="112000"/>
+              </a:lnSpc>
+              <a:spcBef>
+                <a:spcPts val="0"/>
+              </a:spcBef>
+              <a:spcAft>
+                <a:spcPts val="0"/>
+              </a:spcAft>
+              <a:defRPr sz="4800" b="1">
+                <a:solidFill>
+                  <a:srgbClr val="F4EEE4"/>
+                </a:solidFill>
+                <a:latin typeface="Yu Mincho"/>
+              </a:defRPr>
+            </a:pPr>
+            <a:r>
+              <a:t>届かない場所へ。</a:t>
+            </a:r>
+          </a:p>
+        </p:txBody>
+      </p:sp>
+      <p:sp>
+        <p:nvSpPr>
+          <p:cNvPr id="4" name="TextBox 3"/>
+          <p:cNvSpPr txBox="1"/>
+          <p:nvPr/>
+        </p:nvSpPr>
+        <p:spPr>
+          <a:xfrm>
+            <a:off x="609599" y="5448300"/>
+            <a:ext cx="4577059" cy="952500"/>
+          </a:xfrm>
+          <a:prstGeom prst="rect">
+            <a:avLst/>
+          </a:prstGeom>
+          <a:noFill/>
+        </p:spPr>
+        <p:txBody>
+          <a:bodyPr wrap="square" lIns="0" rIns="0" tIns="0" bIns="0" anchor="t">
+            <a:spAutoFit/>
+          </a:bodyPr>
+          <a:lstStyle/>
+          <a:p>
+            <a:pPr algn="l">
+              <a:lnSpc>
+                <a:spcPct val="120000"/>
+              </a:lnSpc>
+              <a:spcBef>
+                <a:spcPts val="0"/>
+              </a:spcBef>
+              <a:spcAft>
+                <a:spcPts val="0"/>
+              </a:spcAft>
+              <a:defRPr sz="2600" b="1">
+                <a:solidFill>
+                  <a:srgbClr val="F4EEE4"/>
+                </a:solidFill>
+                <a:latin typeface="Meiryo"/>
+              </a:defRPr>
+            </a:pPr>
+            <a:r>
+              <a:t>宇部 光太 × 山田 研二 × あらい ひとみ</a:t>
+            </a:r>
+          </a:p>
+        </p:txBody>
+      </p:sp>
     </p:spTree>
   </p:cSld>
   <p:clrMapOvr>
@@ -3138,7 +3250,7 @@
       <p:grpSpPr/>
       <p:pic>
         <p:nvPicPr>
-          <p:cNvPr id="2" name="Picture 1" descr="01_00.jpg"/>
+          <p:cNvPr id="2" name="Picture 1" descr="01_bg.jpg"/>
           <p:cNvPicPr>
             <a:picLocks noChangeAspect="1"/>
           </p:cNvPicPr>
@@ -3160,6 +3272,96 @@
           </a:prstGeom>
         </p:spPr>
       </p:pic>
+      <p:sp>
+        <p:nvSpPr>
+          <p:cNvPr id="3" name="TextBox 2"/>
+          <p:cNvSpPr txBox="1"/>
+          <p:nvPr/>
+        </p:nvSpPr>
+        <p:spPr>
+          <a:xfrm>
+            <a:off x="406399" y="150812"/>
+            <a:ext cx="11379199" cy="349250"/>
+          </a:xfrm>
+          <a:prstGeom prst="rect">
+            <a:avLst/>
+          </a:prstGeom>
+          <a:noFill/>
+        </p:spPr>
+        <p:txBody>
+          <a:bodyPr wrap="square" lIns="0" rIns="0" tIns="0" bIns="0" anchor="t">
+            <a:spAutoFit/>
+          </a:bodyPr>
+          <a:lstStyle/>
+          <a:p>
+            <a:pPr algn="l">
+              <a:lnSpc>
+                <a:spcPct val="120000"/>
+              </a:lnSpc>
+              <a:spcBef>
+                <a:spcPts val="0"/>
+              </a:spcBef>
+              <a:spcAft>
+                <a:spcPts val="0"/>
+              </a:spcAft>
+              <a:defRPr sz="2400" b="1">
+                <a:solidFill>
+                  <a:srgbClr val="D4B36A"/>
+                </a:solidFill>
+                <a:latin typeface="Meiryo"/>
+              </a:defRPr>
+            </a:pPr>
+            <a:r>
+              <a:t>2025年春</a:t>
+            </a:r>
+          </a:p>
+        </p:txBody>
+      </p:sp>
+      <p:sp>
+        <p:nvSpPr>
+          <p:cNvPr id="4" name="TextBox 3"/>
+          <p:cNvSpPr txBox="1"/>
+          <p:nvPr/>
+        </p:nvSpPr>
+        <p:spPr>
+          <a:xfrm>
+            <a:off x="406399" y="596007"/>
+            <a:ext cx="11379199" cy="584200"/>
+          </a:xfrm>
+          <a:prstGeom prst="rect">
+            <a:avLst/>
+          </a:prstGeom>
+          <a:noFill/>
+        </p:spPr>
+        <p:txBody>
+          <a:bodyPr wrap="square" lIns="0" rIns="0" tIns="0" bIns="0" anchor="t">
+            <a:spAutoFit/>
+          </a:bodyPr>
+          <a:lstStyle/>
+          <a:p>
+            <a:pPr algn="l">
+              <a:lnSpc>
+                <a:spcPct val="115000"/>
+              </a:lnSpc>
+              <a:spcBef>
+                <a:spcPts val="0"/>
+              </a:spcBef>
+              <a:spcAft>
+                <a:spcPts val="0"/>
+              </a:spcAft>
+              <a:defRPr sz="4000" b="1">
+                <a:solidFill>
+                  <a:srgbClr val="F4EEE4"/>
+                </a:solidFill>
+                <a:latin typeface="Yu Mincho"/>
+              </a:defRPr>
+            </a:pPr>
+            <a:r>
+              <a:t>三人は、別々の道を歩いていた。</a:t>
+            </a:r>
+          </a:p>
+        </p:txBody>
+      </p:sp>
     </p:spTree>
   </p:cSld>
   <p:clrMapOvr>
@@ -3180,7 +3382,7 @@
       <p:grpSpPr/>
       <p:pic>
         <p:nvPicPr>
-          <p:cNvPr id="2" name="Picture 1" descr="02_00.jpg"/>
+          <p:cNvPr id="2" name="Picture 1" descr="02_bg.jpg"/>
           <p:cNvPicPr>
             <a:picLocks noChangeAspect="1"/>
           </p:cNvPicPr>
@@ -3202,6 +3404,118 @@
           </a:prstGeom>
         </p:spPr>
       </p:pic>
+      <p:sp>
+        <p:nvSpPr>
+          <p:cNvPr id="3" name="TextBox 2"/>
+          <p:cNvSpPr txBox="1"/>
+          <p:nvPr/>
+        </p:nvSpPr>
+        <p:spPr>
+          <a:xfrm>
+            <a:off x="609599" y="1930896"/>
+            <a:ext cx="9662119" cy="1752599"/>
+          </a:xfrm>
+          <a:prstGeom prst="rect">
+            <a:avLst/>
+          </a:prstGeom>
+          <a:noFill/>
+        </p:spPr>
+        <p:txBody>
+          <a:bodyPr wrap="square" lIns="0" rIns="0" tIns="0" bIns="0" anchor="t">
+            <a:spAutoFit/>
+          </a:bodyPr>
+          <a:lstStyle/>
+          <a:p>
+            <a:pPr algn="l">
+              <a:lnSpc>
+                <a:spcPct val="115000"/>
+              </a:lnSpc>
+              <a:spcBef>
+                <a:spcPts val="0"/>
+              </a:spcBef>
+              <a:spcAft>
+                <a:spcPts val="0"/>
+              </a:spcAft>
+              <a:defRPr sz="6000" b="1">
+                <a:solidFill>
+                  <a:srgbClr val="F4EEE4"/>
+                </a:solidFill>
+                <a:latin typeface="Yu Mincho"/>
+              </a:defRPr>
+            </a:pPr>
+            <a:r>
+              <a:t>会話が噛み合わない。</a:t>
+            </a:r>
+          </a:p>
+          <a:p>
+            <a:pPr algn="l">
+              <a:lnSpc>
+                <a:spcPct val="115000"/>
+              </a:lnSpc>
+              <a:spcBef>
+                <a:spcPts val="0"/>
+              </a:spcBef>
+              <a:spcAft>
+                <a:spcPts val="0"/>
+              </a:spcAft>
+              <a:defRPr sz="6000" b="1">
+                <a:solidFill>
+                  <a:srgbClr val="F4EEE4"/>
+                </a:solidFill>
+                <a:latin typeface="Yu Mincho"/>
+              </a:defRPr>
+            </a:pPr>
+            <a:r>
+              <a:t>だから、法人を。</a:t>
+            </a:r>
+          </a:p>
+        </p:txBody>
+      </p:sp>
+      <p:sp>
+        <p:nvSpPr>
+          <p:cNvPr id="4" name="TextBox 3"/>
+          <p:cNvSpPr txBox="1"/>
+          <p:nvPr/>
+        </p:nvSpPr>
+        <p:spPr>
+          <a:xfrm>
+            <a:off x="609599" y="3683496"/>
+            <a:ext cx="9662119" cy="1261864"/>
+          </a:xfrm>
+          <a:prstGeom prst="rect">
+            <a:avLst/>
+          </a:prstGeom>
+          <a:noFill/>
+        </p:spPr>
+        <p:txBody>
+          <a:bodyPr wrap="square" lIns="0" rIns="0" tIns="0" bIns="0" anchor="t">
+            <a:spAutoFit/>
+          </a:bodyPr>
+          <a:lstStyle/>
+          <a:p>
+            <a:pPr algn="l">
+              <a:lnSpc>
+                <a:spcPct val="138000"/>
+              </a:lnSpc>
+              <a:spcBef>
+                <a:spcPts val="0"/>
+              </a:spcBef>
+              <a:spcAft>
+                <a:spcPts val="0"/>
+              </a:spcAft>
+              <a:defRPr sz="3600" b="1">
+                <a:solidFill>
+                  <a:srgbClr val="F4EEE4"/>
+                </a:solidFill>
+                <a:latin typeface="Yu Mincho"/>
+              </a:defRPr>
+            </a:pPr>
+            <a:r>
+              <a:t>「日本一を目指す。一緒に法人を立ち上げよう」</a:t>
+            </a:r>
+          </a:p>
+        </p:txBody>
+      </p:sp>
     </p:spTree>
   </p:cSld>
   <p:clrMapOvr>
@@ -3222,7 +3536,7 @@
       <p:grpSpPr/>
       <p:pic>
         <p:nvPicPr>
-          <p:cNvPr id="2" name="Picture 1" descr="03_00.jpg"/>
+          <p:cNvPr id="2" name="Picture 1" descr="03_bg.jpg"/>
           <p:cNvPicPr>
             <a:picLocks noChangeAspect="1"/>
           </p:cNvPicPr>
@@ -3244,6 +3558,73 @@
           </a:prstGeom>
         </p:spPr>
       </p:pic>
+      <p:sp>
+        <p:nvSpPr>
+          <p:cNvPr id="3" name="TextBox 2"/>
+          <p:cNvSpPr txBox="1"/>
+          <p:nvPr/>
+        </p:nvSpPr>
+        <p:spPr>
+          <a:xfrm>
+            <a:off x="609599" y="2561828"/>
+            <a:ext cx="9662119" cy="1752599"/>
+          </a:xfrm>
+          <a:prstGeom prst="rect">
+            <a:avLst/>
+          </a:prstGeom>
+          <a:noFill/>
+        </p:spPr>
+        <p:txBody>
+          <a:bodyPr wrap="square" lIns="0" rIns="0" tIns="0" bIns="0" anchor="t">
+            <a:spAutoFit/>
+          </a:bodyPr>
+          <a:lstStyle/>
+          <a:p>
+            <a:pPr algn="l">
+              <a:lnSpc>
+                <a:spcPct val="115000"/>
+              </a:lnSpc>
+              <a:spcBef>
+                <a:spcPts val="0"/>
+              </a:spcBef>
+              <a:spcAft>
+                <a:spcPts val="0"/>
+              </a:spcAft>
+              <a:defRPr sz="6000" b="1">
+                <a:solidFill>
+                  <a:srgbClr val="F4EEE4"/>
+                </a:solidFill>
+                <a:latin typeface="Yu Mincho"/>
+              </a:defRPr>
+            </a:pPr>
+            <a:r>
+              <a:t>「一緒に日本一を</a:t>
+            </a:r>
+          </a:p>
+          <a:p>
+            <a:pPr algn="l">
+              <a:lnSpc>
+                <a:spcPct val="115000"/>
+              </a:lnSpc>
+              <a:spcBef>
+                <a:spcPts val="0"/>
+              </a:spcBef>
+              <a:spcAft>
+                <a:spcPts val="0"/>
+              </a:spcAft>
+              <a:defRPr sz="6000" b="1">
+                <a:solidFill>
+                  <a:srgbClr val="F4EEE4"/>
+                </a:solidFill>
+                <a:latin typeface="Yu Mincho"/>
+              </a:defRPr>
+            </a:pPr>
+            <a:r>
+              <a:t>目指そう」</a:t>
+            </a:r>
+          </a:p>
+        </p:txBody>
+      </p:sp>
     </p:spTree>
   </p:cSld>
   <p:clrMapOvr>
@@ -3264,7 +3645,7 @@
       <p:grpSpPr/>
       <p:pic>
         <p:nvPicPr>
-          <p:cNvPr id="2" name="Picture 1" descr="04_00.jpg"/>
+          <p:cNvPr id="2" name="Picture 1" descr="04_bg.jpg"/>
           <p:cNvPicPr>
             <a:picLocks noChangeAspect="1"/>
           </p:cNvPicPr>
@@ -3286,6 +3667,163 @@
           </a:prstGeom>
         </p:spPr>
       </p:pic>
+      <p:sp>
+        <p:nvSpPr>
+          <p:cNvPr id="3" name="TextBox 2"/>
+          <p:cNvSpPr txBox="1"/>
+          <p:nvPr/>
+        </p:nvSpPr>
+        <p:spPr>
+          <a:xfrm>
+            <a:off x="558799" y="304800"/>
+            <a:ext cx="6280149" cy="457200"/>
+          </a:xfrm>
+          <a:prstGeom prst="rect">
+            <a:avLst/>
+          </a:prstGeom>
+          <a:noFill/>
+        </p:spPr>
+        <p:txBody>
+          <a:bodyPr wrap="square" lIns="0" rIns="0" tIns="0" bIns="0" anchor="t">
+            <a:spAutoFit/>
+          </a:bodyPr>
+          <a:lstStyle/>
+          <a:p>
+            <a:pPr algn="l">
+              <a:lnSpc>
+                <a:spcPct val="120000"/>
+              </a:lnSpc>
+              <a:spcBef>
+                <a:spcPts val="0"/>
+              </a:spcBef>
+              <a:spcAft>
+                <a:spcPts val="0"/>
+              </a:spcAft>
+              <a:defRPr sz="2500" b="1">
+                <a:solidFill>
+                  <a:srgbClr val="D4B36A"/>
+                </a:solidFill>
+                <a:latin typeface="Meiryo"/>
+              </a:defRPr>
+            </a:pPr>
+            <a:r>
+              <a:t>2026年4月1日</a:t>
+            </a:r>
+          </a:p>
+        </p:txBody>
+      </p:sp>
+      <p:sp>
+        <p:nvSpPr>
+          <p:cNvPr id="4" name="TextBox 3"/>
+          <p:cNvSpPr txBox="1"/>
+          <p:nvPr/>
+        </p:nvSpPr>
+        <p:spPr>
+          <a:xfrm>
+            <a:off x="558799" y="857250"/>
+            <a:ext cx="6280149" cy="1508720"/>
+          </a:xfrm>
+          <a:prstGeom prst="rect">
+            <a:avLst/>
+          </a:prstGeom>
+          <a:noFill/>
+        </p:spPr>
+        <p:txBody>
+          <a:bodyPr wrap="square" lIns="0" rIns="0" tIns="0" bIns="0" anchor="t">
+            <a:spAutoFit/>
+          </a:bodyPr>
+          <a:lstStyle/>
+          <a:p>
+            <a:pPr algn="l">
+              <a:lnSpc>
+                <a:spcPct val="110000"/>
+              </a:lnSpc>
+              <a:spcBef>
+                <a:spcPts val="0"/>
+              </a:spcBef>
+              <a:spcAft>
+                <a:spcPts val="0"/>
+              </a:spcAft>
+              <a:defRPr sz="5400" b="1">
+                <a:solidFill>
+                  <a:srgbClr val="F4EEE4"/>
+                </a:solidFill>
+                <a:latin typeface="Yu Mincho"/>
+              </a:defRPr>
+            </a:pPr>
+            <a:r>
+              <a:t>覚悟が、</a:t>
+            </a:r>
+          </a:p>
+          <a:p>
+            <a:pPr algn="l">
+              <a:lnSpc>
+                <a:spcPct val="110000"/>
+              </a:lnSpc>
+              <a:spcBef>
+                <a:spcPts val="0"/>
+              </a:spcBef>
+              <a:spcAft>
+                <a:spcPts val="0"/>
+              </a:spcAft>
+              <a:defRPr sz="5400" b="1">
+                <a:solidFill>
+                  <a:srgbClr val="F4EEE4"/>
+                </a:solidFill>
+                <a:latin typeface="Yu Mincho"/>
+              </a:defRPr>
+            </a:pPr>
+            <a:r>
+              <a:t>法人になった。</a:t>
+            </a:r>
+          </a:p>
+        </p:txBody>
+      </p:sp>
+      <p:sp>
+        <p:nvSpPr>
+          <p:cNvPr id="5" name="TextBox 4"/>
+          <p:cNvSpPr txBox="1"/>
+          <p:nvPr/>
+        </p:nvSpPr>
+        <p:spPr>
+          <a:xfrm>
+            <a:off x="7092949" y="5762029"/>
+            <a:ext cx="4641849" cy="613370"/>
+          </a:xfrm>
+          <a:prstGeom prst="rect">
+            <a:avLst/>
+          </a:prstGeom>
+          <a:noFill/>
+        </p:spPr>
+        <p:txBody>
+          <a:bodyPr wrap="square" lIns="0" rIns="0" tIns="0" bIns="0" anchor="t">
+            <a:spAutoFit/>
+          </a:bodyPr>
+          <a:lstStyle/>
+          <a:p>
+            <a:pPr algn="l">
+              <a:lnSpc>
+                <a:spcPct val="105000"/>
+              </a:lnSpc>
+              <a:spcBef>
+                <a:spcPts val="0"/>
+              </a:spcBef>
+              <a:spcAft>
+                <a:spcPts val="0"/>
+              </a:spcAft>
+              <a:defRPr sz="4600" b="1">
+                <a:solidFill>
+                  <a:srgbClr val="F3DDB0"/>
+                </a:solidFill>
+                <a:latin typeface="Yu Mincho"/>
+              </a:defRPr>
+            </a:pPr>
+            <a:r>
+              <a:t>RG株式会社</a:t>
+            </a:r>
+          </a:p>
+        </p:txBody>
+      </p:sp>
     </p:spTree>
   </p:cSld>
   <p:clrMapOvr>
@@ -3306,7 +3844,7 @@
       <p:grpSpPr/>
       <p:pic>
         <p:nvPicPr>
-          <p:cNvPr id="2" name="Picture 1" descr="05_00.jpg"/>
+          <p:cNvPr id="2" name="Picture 1" descr="05_bg.jpg"/>
           <p:cNvPicPr>
             <a:picLocks noChangeAspect="1"/>
           </p:cNvPicPr>
@@ -3328,6 +3866,141 @@
           </a:prstGeom>
         </p:spPr>
       </p:pic>
+      <p:sp>
+        <p:nvSpPr>
+          <p:cNvPr id="3" name="TextBox 2"/>
+          <p:cNvSpPr txBox="1"/>
+          <p:nvPr/>
+        </p:nvSpPr>
+        <p:spPr>
+          <a:xfrm>
+            <a:off x="609599" y="3072705"/>
+            <a:ext cx="3386633" cy="838200"/>
+          </a:xfrm>
+          <a:prstGeom prst="rect">
+            <a:avLst/>
+          </a:prstGeom>
+          <a:noFill/>
+        </p:spPr>
+        <p:txBody>
+          <a:bodyPr wrap="square" lIns="0" rIns="0" tIns="0" bIns="0" anchor="t">
+            <a:spAutoFit/>
+          </a:bodyPr>
+          <a:lstStyle/>
+          <a:p>
+            <a:pPr algn="l">
+              <a:lnSpc>
+                <a:spcPct val="100000"/>
+              </a:lnSpc>
+              <a:spcBef>
+                <a:spcPts val="0"/>
+              </a:spcBef>
+              <a:spcAft>
+                <a:spcPts val="0"/>
+              </a:spcAft>
+              <a:defRPr sz="6600" b="0">
+                <a:solidFill>
+                  <a:srgbClr val="F3DDB0"/>
+                </a:solidFill>
+                <a:latin typeface="Yu Mincho"/>
+              </a:defRPr>
+            </a:pPr>
+            <a:r>
+              <a:t>5店舗</a:t>
+            </a:r>
+          </a:p>
+        </p:txBody>
+      </p:sp>
+      <p:sp>
+        <p:nvSpPr>
+          <p:cNvPr id="4" name="TextBox 3"/>
+          <p:cNvSpPr txBox="1"/>
+          <p:nvPr/>
+        </p:nvSpPr>
+        <p:spPr>
+          <a:xfrm>
+            <a:off x="4402633" y="3072705"/>
+            <a:ext cx="3386633" cy="838200"/>
+          </a:xfrm>
+          <a:prstGeom prst="rect">
+            <a:avLst/>
+          </a:prstGeom>
+          <a:noFill/>
+        </p:spPr>
+        <p:txBody>
+          <a:bodyPr wrap="square" lIns="0" rIns="0" tIns="0" bIns="0" anchor="t">
+            <a:spAutoFit/>
+          </a:bodyPr>
+          <a:lstStyle/>
+          <a:p>
+            <a:pPr algn="l">
+              <a:lnSpc>
+                <a:spcPct val="100000"/>
+              </a:lnSpc>
+              <a:spcBef>
+                <a:spcPts val="0"/>
+              </a:spcBef>
+              <a:spcAft>
+                <a:spcPts val="0"/>
+              </a:spcAft>
+              <a:defRPr sz="6600" b="0">
+                <a:solidFill>
+                  <a:srgbClr val="F3DDB0"/>
+                </a:solidFill>
+                <a:latin typeface="Yu Mincho"/>
+              </a:defRPr>
+            </a:pPr>
+            <a:r>
+              <a:t>3店舗</a:t>
+            </a:r>
+          </a:p>
+        </p:txBody>
+      </p:sp>
+      <p:sp>
+        <p:nvSpPr>
+          <p:cNvPr id="5" name="TextBox 4"/>
+          <p:cNvSpPr txBox="1"/>
+          <p:nvPr/>
+        </p:nvSpPr>
+        <p:spPr>
+          <a:xfrm>
+            <a:off x="8195666" y="3072705"/>
+            <a:ext cx="3386633" cy="838200"/>
+          </a:xfrm>
+          <a:prstGeom prst="rect">
+            <a:avLst/>
+          </a:prstGeom>
+          <a:noFill/>
+        </p:spPr>
+        <p:txBody>
+          <a:bodyPr wrap="square" lIns="0" rIns="0" tIns="0" bIns="0" anchor="t">
+            <a:spAutoFit/>
+          </a:bodyPr>
+          <a:lstStyle/>
+          <a:p>
+            <a:pPr algn="l">
+              <a:lnSpc>
+                <a:spcPct val="100000"/>
+              </a:lnSpc>
+              <a:spcBef>
+                <a:spcPts val="0"/>
+              </a:spcBef>
+              <a:spcAft>
+                <a:spcPts val="0"/>
+              </a:spcAft>
+              <a:defRPr sz="6600" b="0">
+                <a:solidFill>
+                  <a:srgbClr val="F3DDB0"/>
+                </a:solidFill>
+                <a:latin typeface="Yu Mincho"/>
+              </a:defRPr>
+            </a:pPr>
+            <a:r>
+              <a:t>1億</a:t>
+            </a:r>
+          </a:p>
+        </p:txBody>
+      </p:sp>
     </p:spTree>
   </p:cSld>
   <p:clrMapOvr>
@@ -3348,7 +4021,7 @@
       <p:grpSpPr/>
       <p:pic>
         <p:nvPicPr>
-          <p:cNvPr id="2" name="Picture 1" descr="06_00.jpg"/>
+          <p:cNvPr id="2" name="Picture 1" descr="06_bg.jpg"/>
           <p:cNvPicPr>
             <a:picLocks noChangeAspect="1"/>
           </p:cNvPicPr>
@@ -3370,6 +4043,163 @@
           </a:prstGeom>
         </p:spPr>
       </p:pic>
+      <p:sp>
+        <p:nvSpPr>
+          <p:cNvPr id="3" name="TextBox 2"/>
+          <p:cNvSpPr txBox="1"/>
+          <p:nvPr/>
+        </p:nvSpPr>
+        <p:spPr>
+          <a:xfrm>
+            <a:off x="609599" y="2158107"/>
+            <a:ext cx="5760640" cy="1752599"/>
+          </a:xfrm>
+          <a:prstGeom prst="rect">
+            <a:avLst/>
+          </a:prstGeom>
+          <a:noFill/>
+        </p:spPr>
+        <p:txBody>
+          <a:bodyPr wrap="square" lIns="0" rIns="0" tIns="0" bIns="0" anchor="t">
+            <a:spAutoFit/>
+          </a:bodyPr>
+          <a:lstStyle/>
+          <a:p>
+            <a:pPr algn="l">
+              <a:lnSpc>
+                <a:spcPct val="115000"/>
+              </a:lnSpc>
+              <a:spcBef>
+                <a:spcPts val="0"/>
+              </a:spcBef>
+              <a:spcAft>
+                <a:spcPts val="0"/>
+              </a:spcAft>
+              <a:defRPr sz="6000" b="1">
+                <a:solidFill>
+                  <a:srgbClr val="F3DDB0"/>
+                </a:solidFill>
+                <a:latin typeface="Yu Mincho"/>
+              </a:defRPr>
+            </a:pPr>
+            <a:r>
+              <a:t>だから、</a:t>
+            </a:r>
+          </a:p>
+          <a:p>
+            <a:pPr algn="l">
+              <a:lnSpc>
+                <a:spcPct val="115000"/>
+              </a:lnSpc>
+              <a:spcBef>
+                <a:spcPts val="0"/>
+              </a:spcBef>
+              <a:spcAft>
+                <a:spcPts val="0"/>
+              </a:spcAft>
+              <a:defRPr sz="6000" b="1">
+                <a:solidFill>
+                  <a:srgbClr val="F3DDB0"/>
+                </a:solidFill>
+                <a:latin typeface="Yu Mincho"/>
+              </a:defRPr>
+            </a:pPr>
+            <a:r>
+              <a:t>NOVUSを。</a:t>
+            </a:r>
+          </a:p>
+        </p:txBody>
+      </p:sp>
+      <p:sp>
+        <p:nvSpPr>
+          <p:cNvPr id="4" name="TextBox 3"/>
+          <p:cNvSpPr txBox="1"/>
+          <p:nvPr/>
+        </p:nvSpPr>
+        <p:spPr>
+          <a:xfrm>
+            <a:off x="609599" y="4061519"/>
+            <a:ext cx="5760640" cy="631130"/>
+          </a:xfrm>
+          <a:prstGeom prst="rect">
+            <a:avLst/>
+          </a:prstGeom>
+          <a:noFill/>
+        </p:spPr>
+        <p:txBody>
+          <a:bodyPr wrap="square" lIns="0" rIns="0" tIns="0" bIns="0" anchor="t">
+            <a:spAutoFit/>
+          </a:bodyPr>
+          <a:lstStyle/>
+          <a:p>
+            <a:pPr algn="l">
+              <a:lnSpc>
+                <a:spcPct val="142000"/>
+              </a:lnSpc>
+              <a:spcBef>
+                <a:spcPts val="0"/>
+              </a:spcBef>
+              <a:spcAft>
+                <a:spcPts val="0"/>
+              </a:spcAft>
+              <a:defRPr sz="3500" b="0">
+                <a:solidFill>
+                  <a:srgbClr val="F4EEE4"/>
+                </a:solidFill>
+                <a:latin typeface="Meiryo"/>
+              </a:defRPr>
+            </a:pPr>
+            <a:r>
+              <a:t>40歳以下</a:t>
+            </a:r>
+          </a:p>
+        </p:txBody>
+      </p:sp>
+      <p:sp>
+        <p:nvSpPr>
+          <p:cNvPr id="5" name="TextBox 4"/>
+          <p:cNvSpPr txBox="1"/>
+          <p:nvPr/>
+        </p:nvSpPr>
+        <p:spPr>
+          <a:xfrm>
+            <a:off x="6715818" y="3051770"/>
+            <a:ext cx="5232399" cy="1028700"/>
+          </a:xfrm>
+          <a:prstGeom prst="rect">
+            <a:avLst/>
+          </a:prstGeom>
+          <a:noFill/>
+        </p:spPr>
+        <p:txBody>
+          <a:bodyPr wrap="square" lIns="0" rIns="0" tIns="0" bIns="0" anchor="t">
+            <a:spAutoFit/>
+          </a:bodyPr>
+          <a:lstStyle/>
+          <a:p>
+            <a:pPr algn="l">
+              <a:lnSpc>
+                <a:spcPct val="90000"/>
+              </a:lnSpc>
+              <a:spcBef>
+                <a:spcPts val="0"/>
+              </a:spcBef>
+              <a:spcAft>
+                <a:spcPts val="0"/>
+              </a:spcAft>
+              <a:defRPr sz="9000" b="1">
+                <a:solidFill>
+                  <a:srgbClr val="F3DDB0"/>
+                </a:solidFill>
+                <a:latin typeface="Yu Mincho"/>
+              </a:defRPr>
+            </a:pPr>
+            <a:r>
+              <a:t>NOVUS</a:t>
+            </a:r>
+          </a:p>
+        </p:txBody>
+      </p:sp>
     </p:spTree>
   </p:cSld>
   <p:clrMapOvr>

--- a/docs/grano_share_5min.pptx
+++ b/docs/grano_share_5min.pptx
@@ -3566,7 +3566,52 @@
         </p:nvSpPr>
         <p:spPr>
           <a:xfrm>
-            <a:off x="609599" y="2561828"/>
+            <a:off x="609599" y="2285603"/>
+            <a:ext cx="9662119" cy="457200"/>
+          </a:xfrm>
+          <a:prstGeom prst="rect">
+            <a:avLst/>
+          </a:prstGeom>
+          <a:noFill/>
+        </p:spPr>
+        <p:txBody>
+          <a:bodyPr wrap="square" lIns="0" rIns="0" tIns="0" bIns="0" anchor="t">
+            <a:spAutoFit/>
+          </a:bodyPr>
+          <a:lstStyle/>
+          <a:p>
+            <a:pPr algn="l">
+              <a:lnSpc>
+                <a:spcPct val="120000"/>
+              </a:lnSpc>
+              <a:spcBef>
+                <a:spcPts val="0"/>
+              </a:spcBef>
+              <a:spcAft>
+                <a:spcPts val="0"/>
+              </a:spcAft>
+              <a:defRPr sz="2500" b="1">
+                <a:solidFill>
+                  <a:srgbClr val="D4B36A"/>
+                </a:solidFill>
+                <a:latin typeface="Meiryo"/>
+              </a:defRPr>
+            </a:pPr>
+            <a:r>
+              <a:t>2025年冬　北本</a:t>
+            </a:r>
+          </a:p>
+        </p:txBody>
+      </p:sp>
+      <p:sp>
+        <p:nvSpPr>
+          <p:cNvPr id="4" name="TextBox 3"/>
+          <p:cNvSpPr txBox="1"/>
+          <p:nvPr/>
+        </p:nvSpPr>
+        <p:spPr>
+          <a:xfrm>
+            <a:off x="609599" y="2838053"/>
             <a:ext cx="9662119" cy="1752599"/>
           </a:xfrm>
           <a:prstGeom prst="rect">
@@ -3874,7 +3919,7 @@
         </p:nvSpPr>
         <p:spPr>
           <a:xfrm>
-            <a:off x="609599" y="3072705"/>
+            <a:off x="609599" y="2735560"/>
             <a:ext cx="3386633" cy="838200"/>
           </a:xfrm>
           <a:prstGeom prst="rect">
@@ -3919,7 +3964,52 @@
         </p:nvSpPr>
         <p:spPr>
           <a:xfrm>
-            <a:off x="4402633" y="3072705"/>
+            <a:off x="609599" y="3733700"/>
+            <a:ext cx="3386633" cy="514350"/>
+          </a:xfrm>
+          <a:prstGeom prst="rect">
+            <a:avLst/>
+          </a:prstGeom>
+          <a:noFill/>
+        </p:spPr>
+        <p:txBody>
+          <a:bodyPr wrap="square" lIns="0" rIns="0" tIns="0" bIns="0" anchor="t">
+            <a:spAutoFit/>
+          </a:bodyPr>
+          <a:lstStyle/>
+          <a:p>
+            <a:pPr algn="l">
+              <a:lnSpc>
+                <a:spcPct val="120000"/>
+              </a:lnSpc>
+              <a:spcBef>
+                <a:spcPts val="0"/>
+              </a:spcBef>
+              <a:spcAft>
+                <a:spcPts val="0"/>
+              </a:spcAft>
+              <a:defRPr sz="2800" b="1">
+                <a:solidFill>
+                  <a:srgbClr val="F4EEE4"/>
+                </a:solidFill>
+                <a:latin typeface="Meiryo"/>
+              </a:defRPr>
+            </a:pPr>
+            <a:r>
+              <a:t>ネイルFC</a:t>
+            </a:r>
+          </a:p>
+        </p:txBody>
+      </p:sp>
+      <p:sp>
+        <p:nvSpPr>
+          <p:cNvPr id="5" name="TextBox 4"/>
+          <p:cNvSpPr txBox="1"/>
+          <p:nvPr/>
+        </p:nvSpPr>
+        <p:spPr>
+          <a:xfrm>
+            <a:off x="4402633" y="2735560"/>
             <a:ext cx="3386633" cy="838200"/>
           </a:xfrm>
           <a:prstGeom prst="rect">
@@ -3958,13 +4048,58 @@
       </p:sp>
       <p:sp>
         <p:nvSpPr>
-          <p:cNvPr id="5" name="TextBox 4"/>
+          <p:cNvPr id="6" name="TextBox 5"/>
           <p:cNvSpPr txBox="1"/>
           <p:nvPr/>
         </p:nvSpPr>
         <p:spPr>
           <a:xfrm>
-            <a:off x="8195666" y="3072705"/>
+            <a:off x="4402633" y="3733700"/>
+            <a:ext cx="3386633" cy="514350"/>
+          </a:xfrm>
+          <a:prstGeom prst="rect">
+            <a:avLst/>
+          </a:prstGeom>
+          <a:noFill/>
+        </p:spPr>
+        <p:txBody>
+          <a:bodyPr wrap="square" lIns="0" rIns="0" tIns="0" bIns="0" anchor="t">
+            <a:spAutoFit/>
+          </a:bodyPr>
+          <a:lstStyle/>
+          <a:p>
+            <a:pPr algn="l">
+              <a:lnSpc>
+                <a:spcPct val="120000"/>
+              </a:lnSpc>
+              <a:spcBef>
+                <a:spcPts val="0"/>
+              </a:spcBef>
+              <a:spcAft>
+                <a:spcPts val="0"/>
+              </a:spcAft>
+              <a:defRPr sz="2800" b="1">
+                <a:solidFill>
+                  <a:srgbClr val="F4EEE4"/>
+                </a:solidFill>
+                <a:latin typeface="Meiryo"/>
+              </a:defRPr>
+            </a:pPr>
+            <a:r>
+              <a:t>かき氷FC</a:t>
+            </a:r>
+          </a:p>
+        </p:txBody>
+      </p:sp>
+      <p:sp>
+        <p:nvSpPr>
+          <p:cNvPr id="7" name="TextBox 6"/>
+          <p:cNvSpPr txBox="1"/>
+          <p:nvPr/>
+        </p:nvSpPr>
+        <p:spPr>
+          <a:xfrm>
+            <a:off x="8195666" y="2735560"/>
             <a:ext cx="3386633" cy="838200"/>
           </a:xfrm>
           <a:prstGeom prst="rect">
